--- a/diagrams/pptx/thesis_visuals_all_v2.pptx
+++ b/diagrams/pptx/thesis_visuals_all_v2.pptx
@@ -5953,7 +5953,7 @@
                 </a:solidFill>
                 <a:latin typeface="Calibri"/>
               </a:rPr>
-              <a:t>8개 공격 유형 (§4.2.1)</a:t>
+              <a:t>8개 공격 유형</a:t>
             </a:r>
           </a:p>
         </p:txBody>
